--- a/classes/parte-7-red-team-y-operaciones-ofensivas/171-active-directory-kerberoasting-y-ataques-a-kerberos/clase-171-presentacion.pptx
+++ b/classes/parte-7-red-team-y-operaciones-ofensivas/171-active-directory-kerberoasting-y-ataques-a-kerberos/clase-171-presentacion.pptx
@@ -17,6 +17,9 @@
     <p:sldId id="265" r:id="rId16"/>
     <p:sldId id="266" r:id="rId17"/>
     <p:sldId id="267" r:id="rId18"/>
+    <p:sldId id="268" r:id="rId19"/>
+    <p:sldId id="269" r:id="rId20"/>
+    <p:sldId id="270" r:id="rId21"/>
   </p:sldIdLst>
   <p:sldSz cx="9144000" cy="6858000" type="screen4x3"/>
   <p:notesSz cx="6858000" cy="9144000"/>
@@ -3198,7 +3201,7 @@
                   <a:srgbClr val="0B3D2E"/>
                 </a:solidFill>
               </a:rPr>
-              <a:t>⚠️ Errores comunes</a:t>
+              <a:t>✍️ Ejercicios</a:t>
             </a:r>
           </a:p>
         </p:txBody>
@@ -3236,67 +3239,82 @@
                   <a:srgbClr val="22282E"/>
                 </a:solidFill>
               </a:rPr>
-              <a:t>•  No devuelve hashes — No hay cuentas con SPN o credenciales inválidas; revisa enumeración (Clase 170)</a:t>
-            </a:r>
-          </a:p>
-          <a:p>
-            <a:pPr>
-              <a:spcAft>
-                <a:spcPts val="600"/>
-              </a:spcAft>
-            </a:pPr>
-            <a:r>
-              <a:rPr sz="1500">
-                <a:solidFill>
-                  <a:srgbClr val="22282E"/>
-                </a:solidFill>
-              </a:rPr>
-              <a:t>•  Hashcat no cracker — Contraseña fuerte o modo incorrecto; verifica -m 13100/18200 y el diccionario</a:t>
-            </a:r>
-          </a:p>
-          <a:p>
-            <a:pPr>
-              <a:spcAft>
-                <a:spcPts val="600"/>
-              </a:spcAft>
-            </a:pPr>
-            <a:r>
-              <a:rPr sz="1500">
-                <a:solidFill>
-                  <a:srgbClr val="22282E"/>
-                </a:solidFill>
-              </a:rPr>
-              <a:t>•  AS-REP Roasting vacío — Ninguna cuenta con "no preauth"; configúrala en el lab para practicar</a:t>
-            </a:r>
-          </a:p>
-          <a:p>
-            <a:pPr>
-              <a:spcAft>
-                <a:spcPts val="600"/>
-              </a:spcAft>
-            </a:pPr>
-            <a:r>
-              <a:rPr sz="1500">
-                <a:solidFill>
-                  <a:srgbClr val="22282E"/>
-                </a:solidFill>
-              </a:rPr>
-              <a:t>•  Solo hashes AES — Servicio con AES; el crackeo es más lento, usa mejor diccionario/reglas</a:t>
-            </a:r>
-          </a:p>
-          <a:p>
-            <a:pPr>
-              <a:spcAft>
-                <a:spcPts val="600"/>
-              </a:spcAft>
-            </a:pPr>
-            <a:r>
-              <a:rPr sz="1500">
-                <a:solidFill>
-                  <a:srgbClr val="22282E"/>
-                </a:solidFill>
-              </a:rPr>
-              <a:t>•  Detectado al instante — Muchas solicitudes RC4; el SOC alerta por eventos 4769 anómalos</a:t>
+              <a:t>•  Describe el flujo Kerberos y explica por qué el TGS es crackeable.</a:t>
+            </a:r>
+          </a:p>
+          <a:p>
+            <a:pPr>
+              <a:spcAft>
+                <a:spcPts val="600"/>
+              </a:spcAft>
+            </a:pPr>
+            <a:r>
+              <a:rPr sz="1500">
+                <a:solidFill>
+                  <a:srgbClr val="22282E"/>
+                </a:solidFill>
+              </a:rPr>
+              <a:t>•  Ejecuta Kerberoasting y crackea al menos una cuenta del lab.</a:t>
+            </a:r>
+          </a:p>
+          <a:p>
+            <a:pPr>
+              <a:spcAft>
+                <a:spcPts val="600"/>
+              </a:spcAft>
+            </a:pPr>
+            <a:r>
+              <a:rPr sz="1500">
+                <a:solidFill>
+                  <a:srgbClr val="22282E"/>
+                </a:solidFill>
+              </a:rPr>
+              <a:t>•  Encuentra una cuenta sin preautenticación y haz AS-REP Roasting.</a:t>
+            </a:r>
+          </a:p>
+          <a:p>
+            <a:pPr>
+              <a:spcAft>
+                <a:spcPts val="600"/>
+              </a:spcAft>
+            </a:pPr>
+            <a:r>
+              <a:rPr sz="1500">
+                <a:solidFill>
+                  <a:srgbClr val="22282E"/>
+                </a:solidFill>
+              </a:rPr>
+              <a:t>•  Compara tiempos de crackeo RC4 vs AES para el mismo hash.</a:t>
+            </a:r>
+          </a:p>
+          <a:p>
+            <a:pPr>
+              <a:spcAft>
+                <a:spcPts val="600"/>
+              </a:spcAft>
+            </a:pPr>
+            <a:r>
+              <a:rPr sz="1500">
+                <a:solidFill>
+                  <a:srgbClr val="22282E"/>
+                </a:solidFill>
+              </a:rPr>
+              <a:t>•  Explica cómo gMSA mitiga el Kerberoasting.</a:t>
+            </a:r>
+          </a:p>
+          <a:p>
+            <a:pPr>
+              <a:spcAft>
+                <a:spcPts val="600"/>
+              </a:spcAft>
+            </a:pPr>
+            <a:r>
+              <a:rPr sz="1500">
+                <a:solidFill>
+                  <a:srgbClr val="22282E"/>
+                </a:solidFill>
+              </a:rPr>
+              <a:t>•  Escribe la regla de detección basada en el evento 4769 con RC4.</a:t>
             </a:r>
           </a:p>
         </p:txBody>
@@ -3347,7 +3365,7 @@
                   <a:srgbClr val="0B3D2E"/>
                 </a:solidFill>
               </a:rPr>
-              <a:t>❓ Preguntas frecuentes</a:t>
+              <a:t>📝 Reto verificable</a:t>
             </a:r>
           </a:p>
         </p:txBody>
@@ -3385,82 +3403,22 @@
                   <a:srgbClr val="22282E"/>
                 </a:solidFill>
               </a:rPr>
-              <a:t>•  ❓ ¿Kerberoasting necesita privilegios?</a:t>
-            </a:r>
-          </a:p>
-          <a:p>
-            <a:pPr>
-              <a:spcAft>
-                <a:spcPts val="600"/>
-              </a:spcAft>
-            </a:pPr>
-            <a:r>
-              <a:rPr sz="1500">
-                <a:solidFill>
-                  <a:srgbClr val="22282E"/>
-                </a:solidFill>
-              </a:rPr>
-              <a:t>•  No. Cualquier cuenta de dominio puede solicitar TGS de servicios con SPN. Por eso es tan popular: bajo requisito, alto impacto si hay contraseñas débiles.</a:t>
-            </a:r>
-          </a:p>
-          <a:p>
-            <a:pPr>
-              <a:spcAft>
-                <a:spcPts val="600"/>
-              </a:spcAft>
-            </a:pPr>
-            <a:r>
-              <a:rPr sz="1500">
-                <a:solidFill>
-                  <a:srgbClr val="22282E"/>
-                </a:solidFill>
-              </a:rPr>
-              <a:t>•  ❓ ¿Por qué RC4 y no AES?</a:t>
-            </a:r>
-          </a:p>
-          <a:p>
-            <a:pPr>
-              <a:spcAft>
-                <a:spcPts val="600"/>
-              </a:spcAft>
-            </a:pPr>
-            <a:r>
-              <a:rPr sz="1500">
-                <a:solidFill>
-                  <a:srgbClr val="22282E"/>
-                </a:solidFill>
-              </a:rPr>
-              <a:t>•  RC4 se cracker mucho más rápido. Los atacantes fuerzan RC4 cuando pueden; deshabilitarlo y monitorizar el etype 0x17 es una buena defensa.</a:t>
-            </a:r>
-          </a:p>
-          <a:p>
-            <a:pPr>
-              <a:spcAft>
-                <a:spcPts val="600"/>
-              </a:spcAft>
-            </a:pPr>
-            <a:r>
-              <a:rPr sz="1500">
-                <a:solidFill>
-                  <a:srgbClr val="22282E"/>
-                </a:solidFill>
-              </a:rPr>
-              <a:t>•  ❓ ¿Cómo se previene?</a:t>
-            </a:r>
-          </a:p>
-          <a:p>
-            <a:pPr>
-              <a:spcAft>
-                <a:spcPts val="600"/>
-              </a:spcAft>
-            </a:pPr>
-            <a:r>
-              <a:rPr sz="1500">
-                <a:solidFill>
-                  <a:srgbClr val="22282E"/>
-                </a:solidFill>
-              </a:rPr>
-              <a:t>•  Contraseñas largas y aleatorias para cuentas de servicio, uso de gMSA/dMSA, deshabilitar RC4 y monitorizar solicitudes de TGS anómalas.</a:t>
+              <a:t>•  Compromete la contraseña de una cuenta de servicio de tu AD lab mediante Kerberoasting y crackeo offline, y documenta el evento que el DC generó.</a:t>
+            </a:r>
+          </a:p>
+          <a:p>
+            <a:pPr>
+              <a:spcAft>
+                <a:spcPts val="600"/>
+              </a:spcAft>
+            </a:pPr>
+            <a:r>
+              <a:rPr sz="1500">
+                <a:solidFill>
+                  <a:srgbClr val="22282E"/>
+                </a:solidFill>
+              </a:rPr>
+              <a:t>•  Criterio de aceptación: obtienes en claro la contraseña de una cuenta con SPN, muestras el comando de solicitud y el de crackeo, e identificas el evento 4769 con etype RC4 correspondiente en el…</a:t>
             </a:r>
           </a:p>
         </p:txBody>
@@ -3511,7 +3469,7 @@
                   <a:srgbClr val="0B3D2E"/>
                 </a:solidFill>
               </a:rPr>
-              <a:t>🔗 Referencias</a:t>
+              <a:t>⚠️ Errores comunes</a:t>
             </a:r>
           </a:p>
         </p:txBody>
@@ -3549,56 +3507,459 @@
                   <a:srgbClr val="22282E"/>
                 </a:solidFill>
               </a:rPr>
-              <a:t>•  The Hacker Recipes — Kerberoasting / AS-REP Roasting. &lt;https://www.thehacker.recipes/ad/movement/kerberos&gt;</a:t>
-            </a:r>
-          </a:p>
-          <a:p>
-            <a:pPr>
-              <a:spcAft>
-                <a:spcPts val="600"/>
-              </a:spcAft>
-            </a:pPr>
-            <a:r>
-              <a:rPr sz="1500">
-                <a:solidFill>
-                  <a:srgbClr val="22282E"/>
-                </a:solidFill>
-              </a:rPr>
-              <a:t>•  MITRE ATT&amp;CK — Steal or Forge Kerberos Tickets (T1558). &lt;https://attack.mitre.org/techniques/T1558/&gt;</a:t>
-            </a:r>
-          </a:p>
-          <a:p>
-            <a:pPr>
-              <a:spcAft>
-                <a:spcPts val="600"/>
-              </a:spcAft>
-            </a:pPr>
-            <a:r>
-              <a:rPr sz="1500">
-                <a:solidFill>
-                  <a:srgbClr val="22282E"/>
-                </a:solidFill>
-              </a:rPr>
-              <a:t>•  Rubeus. &lt;https://github.com/GhostPack/Rubeus&gt;</a:t>
-            </a:r>
-          </a:p>
-          <a:p>
-            <a:pPr>
-              <a:spcAft>
-                <a:spcPts val="600"/>
-              </a:spcAft>
-            </a:pPr>
-            <a:r>
-              <a:rPr sz="1500">
-                <a:solidFill>
-                  <a:srgbClr val="22282E"/>
-                </a:solidFill>
-              </a:rPr>
-              <a:t>•  Hashcat modes. &lt;https://hashcat.net/wiki/doku.php?id=examplehashes&gt;</a:t>
-            </a:r>
-          </a:p>
-        </p:txBody>
-      </p:sp>
+              <a:t>•  No devuelve hashes — No hay cuentas con SPN o credenciales inválidas; revisa enumeración (Clase 170)</a:t>
+            </a:r>
+          </a:p>
+          <a:p>
+            <a:pPr>
+              <a:spcAft>
+                <a:spcPts val="600"/>
+              </a:spcAft>
+            </a:pPr>
+            <a:r>
+              <a:rPr sz="1500">
+                <a:solidFill>
+                  <a:srgbClr val="22282E"/>
+                </a:solidFill>
+              </a:rPr>
+              <a:t>•  Hashcat no cracker — Contraseña fuerte o modo incorrecto; verifica -m 13100/18200 y el diccionario</a:t>
+            </a:r>
+          </a:p>
+          <a:p>
+            <a:pPr>
+              <a:spcAft>
+                <a:spcPts val="600"/>
+              </a:spcAft>
+            </a:pPr>
+            <a:r>
+              <a:rPr sz="1500">
+                <a:solidFill>
+                  <a:srgbClr val="22282E"/>
+                </a:solidFill>
+              </a:rPr>
+              <a:t>•  AS-REP Roasting vacío — Ninguna cuenta con "no preauth"; configúrala en el lab para practicar</a:t>
+            </a:r>
+          </a:p>
+          <a:p>
+            <a:pPr>
+              <a:spcAft>
+                <a:spcPts val="600"/>
+              </a:spcAft>
+            </a:pPr>
+            <a:r>
+              <a:rPr sz="1500">
+                <a:solidFill>
+                  <a:srgbClr val="22282E"/>
+                </a:solidFill>
+              </a:rPr>
+              <a:t>•  Solo hashes AES — Servicio con AES; el crackeo es más lento, usa mejor diccionario/reglas</a:t>
+            </a:r>
+          </a:p>
+          <a:p>
+            <a:pPr>
+              <a:spcAft>
+                <a:spcPts val="600"/>
+              </a:spcAft>
+            </a:pPr>
+            <a:r>
+              <a:rPr sz="1500">
+                <a:solidFill>
+                  <a:srgbClr val="22282E"/>
+                </a:solidFill>
+              </a:rPr>
+              <a:t>•  Detectado al instante — Muchas solicitudes RC4; el SOC alerta por eventos 4769 anómalos</a:t>
+            </a:r>
+          </a:p>
+        </p:txBody>
+      </p:sp>
+    </p:spTree>
+  </p:cSld>
+  <p:clrMapOvr>
+    <a:masterClrMapping/>
+  </p:clrMapOvr>
+</p:sld>
+</file>
+
+<file path=ppt/slides/slide13.xml><?xml version="1.0" encoding="utf-8"?>
+<p:sld xmlns:a="http://schemas.openxmlformats.org/drawingml/2006/main" xmlns:p="http://schemas.openxmlformats.org/presentationml/2006/main" xmlns:r="http://schemas.openxmlformats.org/officeDocument/2006/relationships">
+  <p:cSld>
+    <p:spTree>
+      <p:nvGrpSpPr>
+        <p:cNvPr id="1" name=""/>
+        <p:cNvGrpSpPr/>
+        <p:nvPr/>
+      </p:nvGrpSpPr>
+      <p:grpSpPr/>
+      <p:sp>
+        <p:nvSpPr>
+          <p:cNvPr id="2" name="TextBox 1"/>
+          <p:cNvSpPr txBox="1"/>
+          <p:nvPr/>
+        </p:nvSpPr>
+        <p:spPr>
+          <a:xfrm>
+            <a:off x="457200" y="320040"/>
+            <a:ext cx="8229600" cy="822960"/>
+          </a:xfrm>
+          <a:prstGeom prst="rect">
+            <a:avLst/>
+          </a:prstGeom>
+          <a:noFill/>
+        </p:spPr>
+        <p:txBody>
+          <a:bodyPr wrap="square">
+            <a:spAutoFit/>
+          </a:bodyPr>
+          <a:lstStyle/>
+          <a:p>
+            <a:r>
+              <a:rPr sz="2600" b="1">
+                <a:solidFill>
+                  <a:srgbClr val="0B3D2E"/>
+                </a:solidFill>
+              </a:rPr>
+              <a:t>❓ Preguntas frecuentes</a:t>
+            </a:r>
+          </a:p>
+        </p:txBody>
+      </p:sp>
+      <p:sp>
+        <p:nvSpPr>
+          <p:cNvPr id="3" name="TextBox 2"/>
+          <p:cNvSpPr txBox="1"/>
+          <p:nvPr/>
+        </p:nvSpPr>
+        <p:spPr>
+          <a:xfrm>
+            <a:off x="457200" y="1280160"/>
+            <a:ext cx="8229600" cy="4937760"/>
+          </a:xfrm>
+          <a:prstGeom prst="rect">
+            <a:avLst/>
+          </a:prstGeom>
+          <a:noFill/>
+        </p:spPr>
+        <p:txBody>
+          <a:bodyPr wrap="square">
+            <a:spAutoFit/>
+          </a:bodyPr>
+          <a:lstStyle/>
+          <a:p>
+            <a:pPr>
+              <a:spcAft>
+                <a:spcPts val="600"/>
+              </a:spcAft>
+            </a:pPr>
+            <a:r>
+              <a:rPr sz="1500">
+                <a:solidFill>
+                  <a:srgbClr val="22282E"/>
+                </a:solidFill>
+              </a:rPr>
+              <a:t>•  ❓ ¿Kerberoasting necesita privilegios?</a:t>
+            </a:r>
+          </a:p>
+          <a:p>
+            <a:pPr>
+              <a:spcAft>
+                <a:spcPts val="600"/>
+              </a:spcAft>
+            </a:pPr>
+            <a:r>
+              <a:rPr sz="1500">
+                <a:solidFill>
+                  <a:srgbClr val="22282E"/>
+                </a:solidFill>
+              </a:rPr>
+              <a:t>•  No. Cualquier cuenta de dominio puede solicitar TGS de servicios con SPN. Por eso es tan popular: bajo requisito, alto impacto si hay contraseñas débiles.</a:t>
+            </a:r>
+          </a:p>
+          <a:p>
+            <a:pPr>
+              <a:spcAft>
+                <a:spcPts val="600"/>
+              </a:spcAft>
+            </a:pPr>
+            <a:r>
+              <a:rPr sz="1500">
+                <a:solidFill>
+                  <a:srgbClr val="22282E"/>
+                </a:solidFill>
+              </a:rPr>
+              <a:t>•  ❓ ¿Por qué importa retirar RC4?</a:t>
+            </a:r>
+          </a:p>
+          <a:p>
+            <a:pPr>
+              <a:spcAft>
+                <a:spcPts val="600"/>
+              </a:spcAft>
+            </a:pPr>
+            <a:r>
+              <a:rPr sz="1500">
+                <a:solidFill>
+                  <a:srgbClr val="22282E"/>
+                </a:solidFill>
+              </a:rPr>
+              <a:t>•  El material RC4 permite comprobaciones de candidatos mucho más económicas que los tipos AES habituales. Su retirada debe planificarse con inventario de compatibilidad, y siempre se combina con claves…</a:t>
+            </a:r>
+          </a:p>
+          <a:p>
+            <a:pPr>
+              <a:spcAft>
+                <a:spcPts val="600"/>
+              </a:spcAft>
+            </a:pPr>
+            <a:r>
+              <a:rPr sz="1500">
+                <a:solidFill>
+                  <a:srgbClr val="22282E"/>
+                </a:solidFill>
+              </a:rPr>
+              <a:t>•  ❓ ¿Cómo se previene?</a:t>
+            </a:r>
+          </a:p>
+          <a:p>
+            <a:pPr>
+              <a:spcAft>
+                <a:spcPts val="600"/>
+              </a:spcAft>
+            </a:pPr>
+            <a:r>
+              <a:rPr sz="1500">
+                <a:solidFill>
+                  <a:srgbClr val="22282E"/>
+                </a:solidFill>
+              </a:rPr>
+              <a:t>•  Contraseñas largas y aleatorias para cuentas de servicio, uso de gMSA/dMSA, deshabilitar RC4 y monitorizar solicitudes de TGS anómalas.</a:t>
+            </a:r>
+          </a:p>
+        </p:txBody>
+      </p:sp>
+    </p:spTree>
+  </p:cSld>
+  <p:clrMapOvr>
+    <a:masterClrMapping/>
+  </p:clrMapOvr>
+</p:sld>
+</file>
+
+<file path=ppt/slides/slide14.xml><?xml version="1.0" encoding="utf-8"?>
+<p:sld xmlns:a="http://schemas.openxmlformats.org/drawingml/2006/main" xmlns:p="http://schemas.openxmlformats.org/presentationml/2006/main" xmlns:r="http://schemas.openxmlformats.org/officeDocument/2006/relationships">
+  <p:cSld>
+    <p:spTree>
+      <p:nvGrpSpPr>
+        <p:cNvPr id="1" name=""/>
+        <p:cNvGrpSpPr/>
+        <p:nvPr/>
+      </p:nvGrpSpPr>
+      <p:grpSpPr/>
+      <p:sp>
+        <p:nvSpPr>
+          <p:cNvPr id="2" name="TextBox 1"/>
+          <p:cNvSpPr txBox="1"/>
+          <p:nvPr/>
+        </p:nvSpPr>
+        <p:spPr>
+          <a:xfrm>
+            <a:off x="457200" y="320040"/>
+            <a:ext cx="8229600" cy="822960"/>
+          </a:xfrm>
+          <a:prstGeom prst="rect">
+            <a:avLst/>
+          </a:prstGeom>
+          <a:noFill/>
+        </p:spPr>
+        <p:txBody>
+          <a:bodyPr wrap="square">
+            <a:spAutoFit/>
+          </a:bodyPr>
+          <a:lstStyle/>
+          <a:p>
+            <a:r>
+              <a:rPr sz="2600" b="1">
+                <a:solidFill>
+                  <a:srgbClr val="0B3D2E"/>
+                </a:solidFill>
+              </a:rPr>
+              <a:t>🔗 Referencias</a:t>
+            </a:r>
+          </a:p>
+        </p:txBody>
+      </p:sp>
+      <p:sp>
+        <p:nvSpPr>
+          <p:cNvPr id="3" name="TextBox 2"/>
+          <p:cNvSpPr txBox="1"/>
+          <p:nvPr/>
+        </p:nvSpPr>
+        <p:spPr>
+          <a:xfrm>
+            <a:off x="457200" y="1280160"/>
+            <a:ext cx="8229600" cy="4937760"/>
+          </a:xfrm>
+          <a:prstGeom prst="rect">
+            <a:avLst/>
+          </a:prstGeom>
+          <a:noFill/>
+        </p:spPr>
+        <p:txBody>
+          <a:bodyPr wrap="square">
+            <a:spAutoFit/>
+          </a:bodyPr>
+          <a:lstStyle/>
+          <a:p>
+            <a:pPr>
+              <a:spcAft>
+                <a:spcPts val="600"/>
+              </a:spcAft>
+            </a:pPr>
+            <a:r>
+              <a:rPr sz="1500">
+                <a:solidFill>
+                  <a:srgbClr val="22282E"/>
+                </a:solidFill>
+              </a:rPr>
+              <a:t>•  Microsoft — Kerberos authentication overview. &lt;https://learn.microsoft.com/en-us/windows-server/security/kerberos/kerberos-authentication-overview&gt; — fuente principal para el papel del KDC, TGT…</a:t>
+            </a:r>
+          </a:p>
+          <a:p>
+            <a:pPr>
+              <a:spcAft>
+                <a:spcPts val="600"/>
+              </a:spcAft>
+            </a:pPr>
+            <a:r>
+              <a:rPr sz="1500">
+                <a:solidFill>
+                  <a:srgbClr val="22282E"/>
+                </a:solidFill>
+              </a:rPr>
+              <a:t>•  Microsoft — Mutual Authentication Using Kerberos. &lt;https://learn.microsoft.com/en-us/windows/win32/ad/mutual-authentication-using-kerberos&gt; — sustenta la relación entre SPN, cuenta de servicio y…</a:t>
+            </a:r>
+          </a:p>
+          <a:p>
+            <a:pPr>
+              <a:spcAft>
+                <a:spcPts val="600"/>
+              </a:spcAft>
+            </a:pPr>
+            <a:r>
+              <a:rPr sz="1500">
+                <a:solidFill>
+                  <a:srgbClr val="22282E"/>
+                </a:solidFill>
+              </a:rPr>
+              <a:t>•  MITRE ATT&amp;CK — Kerberoasting (T1558.003). &lt;https://attack.mitre.org/techniques/T1558/003/&gt; — condiciones, fuentes de detección y mitigaciones de la técnica.</a:t>
+            </a:r>
+          </a:p>
+          <a:p>
+            <a:pPr>
+              <a:spcAft>
+                <a:spcPts val="600"/>
+              </a:spcAft>
+            </a:pPr>
+            <a:r>
+              <a:rPr sz="1500">
+                <a:solidFill>
+                  <a:srgbClr val="22282E"/>
+                </a:solidFill>
+              </a:rPr>
+              <a:t>•  MITRE ATT&amp;CK — AS-REP Roasting (T1558.004). &lt;https://attack.mitre.org/techniques/T1558/004/&gt; — referencia para no confundir la ausencia de preautenticación con Kerberoasting.</a:t>
+            </a:r>
+          </a:p>
+          <a:p>
+            <a:pPr>
+              <a:spcAft>
+                <a:spcPts val="600"/>
+              </a:spcAft>
+            </a:pPr>
+            <a:r>
+              <a:rPr sz="1500">
+                <a:solidFill>
+                  <a:srgbClr val="22282E"/>
+                </a:solidFill>
+              </a:rPr>
+              <a:t>•  Rubeus. &lt;https://github.com/GhostPack/Rubeus&gt; y Hashcat — example hashes. &lt;https://hashcat.net/wiki/doku.php?id=examplehashes&gt; — documentación de las herramientas del laboratorio; no sustituyen la…</a:t>
+            </a:r>
+          </a:p>
+        </p:txBody>
+      </p:sp>
+    </p:spTree>
+  </p:cSld>
+  <p:clrMapOvr>
+    <a:masterClrMapping/>
+  </p:clrMapOvr>
+</p:sld>
+</file>
+
+<file path=ppt/slides/slide15.xml><?xml version="1.0" encoding="utf-8"?>
+<p:sld xmlns:a="http://schemas.openxmlformats.org/drawingml/2006/main" xmlns:p="http://schemas.openxmlformats.org/presentationml/2006/main" xmlns:r="http://schemas.openxmlformats.org/officeDocument/2006/relationships">
+  <p:cSld>
+    <p:spTree>
+      <p:nvGrpSpPr>
+        <p:cNvPr id="1" name=""/>
+        <p:cNvGrpSpPr/>
+        <p:nvPr/>
+      </p:nvGrpSpPr>
+      <p:grpSpPr/>
+      <p:sp>
+        <p:nvSpPr>
+          <p:cNvPr id="2" name="TextBox 1"/>
+          <p:cNvSpPr txBox="1"/>
+          <p:nvPr/>
+        </p:nvSpPr>
+        <p:spPr>
+          <a:xfrm>
+            <a:off x="457200" y="274320"/>
+            <a:ext cx="8229600" cy="640080"/>
+          </a:xfrm>
+          <a:prstGeom prst="rect">
+            <a:avLst/>
+          </a:prstGeom>
+          <a:noFill/>
+        </p:spPr>
+        <p:txBody>
+          <a:bodyPr wrap="square">
+            <a:spAutoFit/>
+          </a:bodyPr>
+          <a:lstStyle/>
+          <a:p>
+            <a:r>
+              <a:rPr sz="2200" b="1">
+                <a:solidFill>
+                  <a:srgbClr val="0B3D2E"/>
+                </a:solidFill>
+              </a:rPr>
+              <a:t>Diagrama de la clase</a:t>
+            </a:r>
+          </a:p>
+        </p:txBody>
+      </p:sp>
+      <p:pic>
+        <p:nvPicPr>
+          <p:cNvPr id="3" name="Picture 2" descr="188285b9411ca073.png"/>
+          <p:cNvPicPr>
+            <a:picLocks noChangeAspect="1"/>
+          </p:cNvPicPr>
+          <p:nvPr/>
+        </p:nvPicPr>
+        <p:blipFill>
+          <a:blip r:embed="rId2"/>
+          <a:stretch>
+            <a:fillRect/>
+          </a:stretch>
+        </p:blipFill>
+        <p:spPr>
+          <a:xfrm>
+            <a:off x="457200" y="1952244"/>
+            <a:ext cx="8229600" cy="3593592"/>
+          </a:xfrm>
+          <a:prstGeom prst="rect">
+            <a:avLst/>
+          </a:prstGeom>
+        </p:spPr>
+      </p:pic>
     </p:spTree>
   </p:cSld>
   <p:clrMapOvr>
@@ -3683,7 +4044,7 @@
                   <a:srgbClr val="22282E"/>
                 </a:solidFill>
               </a:rPr>
-              <a:t>•  Entender el protocolo Kerberos lo suficiente para atacar sus puntos débiles: Kerberoasting (robo y crackeo offline de tickets de servicio), AS-REP Roasting (usuarios sin preautenticación) y las bases de los ataques de tickets. El alumno ejecutará estos ataques en su AD lab y comprenderá por qué funcionan y cómo se detectan.</a:t>
+              <a:t>•  Entender el protocolo Kerberos lo suficiente para atacar sus puntos débiles: Kerberoasting (robo y crackeo offline de tickets de servicio), AS-REP Roasting (usuarios sin preautenticación) y las bases…</a:t>
             </a:r>
           </a:p>
         </p:txBody>
@@ -4077,7 +4438,7 @@
                   <a:srgbClr val="0B3D2E"/>
                 </a:solidFill>
               </a:rPr>
-              <a:t>📖 Definiciones y características</a:t>
+              <a:t>🧠 Explicación en profundidad</a:t>
             </a:r>
           </a:p>
         </p:txBody>
@@ -4115,82 +4476,82 @@
                   <a:srgbClr val="22282E"/>
                 </a:solidFill>
               </a:rPr>
-              <a:t>•  TGT (Ticket Granting Ticket): ticket inicial que prueba la identidad. Característica: cifrado con la clave de krbtgt.</a:t>
-            </a:r>
-          </a:p>
-          <a:p>
-            <a:pPr>
-              <a:spcAft>
-                <a:spcPts val="600"/>
-              </a:spcAft>
-            </a:pPr>
-            <a:r>
-              <a:rPr sz="1500">
-                <a:solidFill>
-                  <a:srgbClr val="22282E"/>
-                </a:solidFill>
-              </a:rPr>
-              <a:t>•  TGS (Ticket Granting Service ticket): ticket para un servicio concreto. Característica: parte va cifrada con el hash de la cuenta de servicio → crackeable.</a:t>
-            </a:r>
-          </a:p>
-          <a:p>
-            <a:pPr>
-              <a:spcAft>
-                <a:spcPts val="600"/>
-              </a:spcAft>
-            </a:pPr>
-            <a:r>
-              <a:rPr sz="1500">
-                <a:solidFill>
-                  <a:srgbClr val="22282E"/>
-                </a:solidFill>
-              </a:rPr>
-              <a:t>•  Kerberoasting: pedir TGS de cuentas con SPN y crackear offline su contraseña. Característica: no requiere privilegios, solo una cuenta de dominio.</a:t>
-            </a:r>
-          </a:p>
-          <a:p>
-            <a:pPr>
-              <a:spcAft>
-                <a:spcPts val="600"/>
-              </a:spcAft>
-            </a:pPr>
-            <a:r>
-              <a:rPr sz="1500">
-                <a:solidFill>
-                  <a:srgbClr val="22282E"/>
-                </a:solidFill>
-              </a:rPr>
-              <a:t>•  AS-REP Roasting: para usuarios con "no preauth", el AS-REP contiene material crackeable. Característica: ni siquiera hace falta conocer una contraseña.</a:t>
-            </a:r>
-          </a:p>
-          <a:p>
-            <a:pPr>
-              <a:spcAft>
-                <a:spcPts val="600"/>
-              </a:spcAft>
-            </a:pPr>
-            <a:r>
-              <a:rPr sz="1500">
-                <a:solidFill>
-                  <a:srgbClr val="22282E"/>
-                </a:solidFill>
-              </a:rPr>
-              <a:t>•  Preautenticación: paso que evita ataques al AS-REQ. Característica: deshabilitarla abre AS-REP Roasting.</a:t>
-            </a:r>
-          </a:p>
-          <a:p>
-            <a:pPr>
-              <a:spcAft>
-                <a:spcPts val="600"/>
-              </a:spcAft>
-            </a:pPr>
-            <a:r>
-              <a:rPr sz="1500">
-                <a:solidFill>
-                  <a:srgbClr val="22282E"/>
-                </a:solidFill>
-              </a:rPr>
-              <a:t>•  RC4 (etype 23): cifrado débil aún soportado. Característica: acelera enormemente el crackeo frente a AES.</a:t>
+              <a:t>•  En un dominio, el Key Distribution Center (KDC) se ejecuta en los controladores de dominio y ofrece dos funciones lógicas: el Authentication Service y el Ticket Granting Service. Tras una…</a:t>
+            </a:r>
+          </a:p>
+          <a:p>
+            <a:pPr>
+              <a:spcAft>
+                <a:spcPts val="600"/>
+              </a:spcAft>
+            </a:pPr>
+            <a:r>
+              <a:rPr sz="1500">
+                <a:solidFill>
+                  <a:srgbClr val="22282E"/>
+                </a:solidFill>
+              </a:rPr>
+              <a:t>•  Un ticket contiene información para el cliente y una parte protegida con una clave que el servicio correspondiente puede validar. El TGT está protegido con claves de krbtgt; el ticket de servicio…</a:t>
+            </a:r>
+          </a:p>
+          <a:p>
+            <a:pPr>
+              <a:spcAft>
+                <a:spcPts val="600"/>
+              </a:spcAft>
+            </a:pPr>
+            <a:r>
+              <a:rPr sz="1500">
+                <a:solidFill>
+                  <a:srgbClr val="22282E"/>
+                </a:solidFill>
+              </a:rPr>
+              <a:t>•  Solicitar tickets para servicios es una operación normal. El riesgo aparece cuando el SPN está ligado a una cuenta con contraseña débil, reutilizada o muy antigua. ATT&amp;CK clasifica esta actividad…</a:t>
+            </a:r>
+          </a:p>
+          <a:p>
+            <a:pPr>
+              <a:spcAft>
+                <a:spcPts val="600"/>
+              </a:spcAft>
+            </a:pPr>
+            <a:r>
+              <a:rPr sz="1500">
+                <a:solidFill>
+                  <a:srgbClr val="22282E"/>
+                </a:solidFill>
+              </a:rPr>
+              <a:t>•  El tipo de cifrado afecta al coste, pero no es una garantía aislada. RC4 utiliza material derivado del hash NT y facilita cracking muy optimizado; AES incorpora claves derivadas con sal. Aun así, una…</a:t>
+            </a:r>
+          </a:p>
+          <a:p>
+            <a:pPr>
+              <a:spcAft>
+                <a:spcPts val="600"/>
+              </a:spcAft>
+            </a:pPr>
+            <a:r>
+              <a:rPr sz="1500">
+                <a:solidFill>
+                  <a:srgbClr val="22282E"/>
+                </a:solidFill>
+              </a:rPr>
+              <a:t>•  La preautenticación obliga al cliente a demostrar conocimiento de su clave antes de que el KDC entregue una respuesta aprovechable. Si una cuenta tiene deshabilitado ese requisito, puede solicitarse…</a:t>
+            </a:r>
+          </a:p>
+          <a:p>
+            <a:pPr>
+              <a:spcAft>
+                <a:spcPts val="600"/>
+              </a:spcAft>
+            </a:pPr>
+            <a:r>
+              <a:rPr sz="1500">
+                <a:solidFill>
+                  <a:srgbClr val="22282E"/>
+                </a:solidFill>
+              </a:rPr>
+              <a:t>•  El evento 4768 registra solicitudes de TGT y el 4769 solicitudes de tickets de servicio cuando la auditoría correspondiente está habilitada. Un único 4769 no prueba abuso: es parte normal de…</a:t>
             </a:r>
           </a:p>
         </p:txBody>
@@ -4241,7 +4602,7 @@
                   <a:srgbClr val="0B3D2E"/>
                 </a:solidFill>
               </a:rPr>
-              <a:t>🧰 Herramientas y preparación</a:t>
+              <a:t>📖 Definiciones y características</a:t>
             </a:r>
           </a:p>
         </p:txBody>
@@ -4279,52 +4640,82 @@
                   <a:srgbClr val="22282E"/>
                 </a:solidFill>
               </a:rPr>
-              <a:t>•  El AD lab / GOAD de la clase anterior, con al menos una cuenta de servicio con SPN y contraseña débil.</a:t>
-            </a:r>
-          </a:p>
-          <a:p>
-            <a:pPr>
-              <a:spcAft>
-                <a:spcPts val="600"/>
-              </a:spcAft>
-            </a:pPr>
-            <a:r>
-              <a:rPr sz="1500">
-                <a:solidFill>
-                  <a:srgbClr val="22282E"/>
-                </a:solidFill>
-              </a:rPr>
-              <a:t>•  Impacket: GetUserSPNs.py, GetNPUsers.py.</a:t>
-            </a:r>
-          </a:p>
-          <a:p>
-            <a:pPr>
-              <a:spcAft>
-                <a:spcPts val="600"/>
-              </a:spcAft>
-            </a:pPr>
-            <a:r>
-              <a:rPr sz="1500">
-                <a:solidFill>
-                  <a:srgbClr val="22282E"/>
-                </a:solidFill>
-              </a:rPr>
-              <a:t>•  Rubeus (desde Windows) como alternativa nativa.</a:t>
-            </a:r>
-          </a:p>
-          <a:p>
-            <a:pPr>
-              <a:spcAft>
-                <a:spcPts val="600"/>
-              </a:spcAft>
-            </a:pPr>
-            <a:r>
-              <a:rPr sz="1500">
-                <a:solidFill>
-                  <a:srgbClr val="22282E"/>
-                </a:solidFill>
-              </a:rPr>
-              <a:t>•  Hashcat con diccionarios (rockyou) para el crackeo offline.</a:t>
+              <a:t>•  TGT (Ticket Granting Ticket): ticket inicial que prueba la identidad. Característica: cifrado con la clave de krbtgt.</a:t>
+            </a:r>
+          </a:p>
+          <a:p>
+            <a:pPr>
+              <a:spcAft>
+                <a:spcPts val="600"/>
+              </a:spcAft>
+            </a:pPr>
+            <a:r>
+              <a:rPr sz="1500">
+                <a:solidFill>
+                  <a:srgbClr val="22282E"/>
+                </a:solidFill>
+              </a:rPr>
+              <a:t>•  TGS (ticket de servicio): ticket para un servicio concreto. Característica: una parte se protege con una clave de la cuenta de servicio; su derivación depende del tipo de cifrado.</a:t>
+            </a:r>
+          </a:p>
+          <a:p>
+            <a:pPr>
+              <a:spcAft>
+                <a:spcPts val="600"/>
+              </a:spcAft>
+            </a:pPr>
+            <a:r>
+              <a:rPr sz="1500">
+                <a:solidFill>
+                  <a:srgbClr val="22282E"/>
+                </a:solidFill>
+              </a:rPr>
+              <a:t>•  Kerberoasting: pedir TGS de cuentas con SPN y crackear offline su contraseña. Característica: no requiere privilegios, solo una cuenta de dominio.</a:t>
+            </a:r>
+          </a:p>
+          <a:p>
+            <a:pPr>
+              <a:spcAft>
+                <a:spcPts val="600"/>
+              </a:spcAft>
+            </a:pPr>
+            <a:r>
+              <a:rPr sz="1500">
+                <a:solidFill>
+                  <a:srgbClr val="22282E"/>
+                </a:solidFill>
+              </a:rPr>
+              <a:t>•  AS-REP Roasting: para usuarios con "no preauth", el AS-REP contiene material crackeable. Característica: ni siquiera hace falta conocer una contraseña.</a:t>
+            </a:r>
+          </a:p>
+          <a:p>
+            <a:pPr>
+              <a:spcAft>
+                <a:spcPts val="600"/>
+              </a:spcAft>
+            </a:pPr>
+            <a:r>
+              <a:rPr sz="1500">
+                <a:solidFill>
+                  <a:srgbClr val="22282E"/>
+                </a:solidFill>
+              </a:rPr>
+              <a:t>•  Preautenticación: paso que evita ataques al AS-REQ. Característica: deshabilitarla abre AS-REP Roasting.</a:t>
+            </a:r>
+          </a:p>
+          <a:p>
+            <a:pPr>
+              <a:spcAft>
+                <a:spcPts val="600"/>
+              </a:spcAft>
+            </a:pPr>
+            <a:r>
+              <a:rPr sz="1500">
+                <a:solidFill>
+                  <a:srgbClr val="22282E"/>
+                </a:solidFill>
+              </a:rPr>
+              <a:t>•  RC4 (etype 23): cifrado débil aún soportado. Característica: acelera enormemente el crackeo frente a AES.</a:t>
             </a:r>
           </a:p>
         </p:txBody>
@@ -4375,7 +4766,7 @@
                   <a:srgbClr val="0B3D2E"/>
                 </a:solidFill>
               </a:rPr>
-              <a:t>🧪 Laboratorio guiado</a:t>
+              <a:t>📔 Glosario</a:t>
             </a:r>
           </a:p>
         </p:txBody>
@@ -4413,97 +4804,97 @@
                   <a:srgbClr val="22282E"/>
                 </a:solidFill>
               </a:rPr>
-              <a:t>•  Repaso del flujo. Dibuja AS-REQ → AS-REP (TGT) → TGS-REQ → TGS-REP y marca dónde entra material crackeable.</a:t>
-            </a:r>
-          </a:p>
-          <a:p>
-            <a:pPr>
-              <a:spcAft>
-                <a:spcPts val="600"/>
-              </a:spcAft>
-            </a:pPr>
-            <a:r>
-              <a:rPr sz="1500">
-                <a:solidFill>
-                  <a:srgbClr val="22282E"/>
-                </a:solidFill>
-              </a:rPr>
-              <a:t>•  Kerberoasting con Impacket:</a:t>
-            </a:r>
-          </a:p>
-          <a:p>
-            <a:pPr>
-              <a:spcAft>
-                <a:spcPts val="600"/>
-              </a:spcAft>
-            </a:pPr>
-            <a:r>
-              <a:rPr sz="1500">
-                <a:solidFill>
-                  <a:srgbClr val="22282E"/>
-                </a:solidFill>
-              </a:rPr>
-              <a:t>•  GetUserSPNs.py lab.local/lowuser:Passw0rd -dc-ip 10.10.10.10 -request -outputfile roast.txt</a:t>
-            </a:r>
-          </a:p>
-          <a:p>
-            <a:pPr>
-              <a:spcAft>
-                <a:spcPts val="600"/>
-              </a:spcAft>
-            </a:pPr>
-            <a:r>
-              <a:rPr sz="1500">
-                <a:solidFill>
-                  <a:srgbClr val="22282E"/>
-                </a:solidFill>
-              </a:rPr>
-              <a:t>•  Crackea offline:</a:t>
-            </a:r>
-          </a:p>
-          <a:p>
-            <a:pPr>
-              <a:spcAft>
-                <a:spcPts val="600"/>
-              </a:spcAft>
-            </a:pPr>
-            <a:r>
-              <a:rPr sz="1500">
-                <a:solidFill>
-                  <a:srgbClr val="22282E"/>
-                </a:solidFill>
-              </a:rPr>
-              <a:t>•  hashcat -m 13100 roast.txt /usr/share/wordlists/rockyou.txt</a:t>
-            </a:r>
-          </a:p>
-          <a:p>
-            <a:pPr>
-              <a:spcAft>
-                <a:spcPts val="600"/>
-              </a:spcAft>
-            </a:pPr>
-            <a:r>
-              <a:rPr sz="1500">
-                <a:solidFill>
-                  <a:srgbClr val="22282E"/>
-                </a:solidFill>
-              </a:rPr>
-              <a:t>•  Recupera la contraseña de la cuenta de servicio.</a:t>
-            </a:r>
-          </a:p>
-          <a:p>
-            <a:pPr>
-              <a:spcAft>
-                <a:spcPts val="600"/>
-              </a:spcAft>
-            </a:pPr>
-            <a:r>
-              <a:rPr sz="1500">
-                <a:solidFill>
-                  <a:srgbClr val="22282E"/>
-                </a:solidFill>
-              </a:rPr>
-              <a:t>•  AS-REP Roasting:</a:t>
+              <a:t>•  KDC: servicio de distribución de claves que emite tickets Kerberos en el dominio.</a:t>
+            </a:r>
+          </a:p>
+          <a:p>
+            <a:pPr>
+              <a:spcAft>
+                <a:spcPts val="600"/>
+              </a:spcAft>
+            </a:pPr>
+            <a:r>
+              <a:rPr sz="1500">
+                <a:solidFill>
+                  <a:srgbClr val="22282E"/>
+                </a:solidFill>
+              </a:rPr>
+              <a:t>•  Authentication Service: función del KDC que procesa la autenticación inicial y emite el TGT.</a:t>
+            </a:r>
+          </a:p>
+          <a:p>
+            <a:pPr>
+              <a:spcAft>
+                <a:spcPts val="600"/>
+              </a:spcAft>
+            </a:pPr>
+            <a:r>
+              <a:rPr sz="1500">
+                <a:solidFill>
+                  <a:srgbClr val="22282E"/>
+                </a:solidFill>
+              </a:rPr>
+              <a:t>•  Ticket Granting Service: función del KDC que emite tickets para servicios concretos.</a:t>
+            </a:r>
+          </a:p>
+          <a:p>
+            <a:pPr>
+              <a:spcAft>
+                <a:spcPts val="600"/>
+              </a:spcAft>
+            </a:pPr>
+            <a:r>
+              <a:rPr sz="1500">
+                <a:solidFill>
+                  <a:srgbClr val="22282E"/>
+                </a:solidFill>
+              </a:rPr>
+              <a:t>•  TGT: ticket reutilizable para solicitar otros tickets durante su vigencia.</a:t>
+            </a:r>
+          </a:p>
+          <a:p>
+            <a:pPr>
+              <a:spcAft>
+                <a:spcPts val="600"/>
+              </a:spcAft>
+            </a:pPr>
+            <a:r>
+              <a:rPr sz="1500">
+                <a:solidFill>
+                  <a:srgbClr val="22282E"/>
+                </a:solidFill>
+              </a:rPr>
+              <a:t>•  Ticket de servicio: credencial Kerberos presentada a una instancia identificada por un SPN.</a:t>
+            </a:r>
+          </a:p>
+          <a:p>
+            <a:pPr>
+              <a:spcAft>
+                <a:spcPts val="600"/>
+              </a:spcAft>
+            </a:pPr>
+            <a:r>
+              <a:rPr sz="1500">
+                <a:solidFill>
+                  <a:srgbClr val="22282E"/>
+                </a:solidFill>
+              </a:rPr>
+              <a:t>•  SPN: nombre que vincula una instancia de servicio con su cuenta de inicio de sesión.</a:t>
+            </a:r>
+          </a:p>
+          <a:p>
+            <a:pPr>
+              <a:spcAft>
+                <a:spcPts val="600"/>
+              </a:spcAft>
+            </a:pPr>
+            <a:r>
+              <a:rPr sz="1500">
+                <a:solidFill>
+                  <a:srgbClr val="22282E"/>
+                </a:solidFill>
+              </a:rPr>
+              <a:t>•  Preautenticación: prueba previa de posesión de clave incluida en el intercambio inicial.</a:t>
             </a:r>
           </a:p>
         </p:txBody>
@@ -4554,7 +4945,7 @@
                   <a:srgbClr val="0B3D2E"/>
                 </a:solidFill>
               </a:rPr>
-              <a:t>✍️ Ejercicios</a:t>
+              <a:t>🧰 Herramientas y preparación</a:t>
             </a:r>
           </a:p>
         </p:txBody>
@@ -4592,82 +4983,52 @@
                   <a:srgbClr val="22282E"/>
                 </a:solidFill>
               </a:rPr>
-              <a:t>•  Describe el flujo Kerberos y explica por qué el TGS es crackeable.</a:t>
-            </a:r>
-          </a:p>
-          <a:p>
-            <a:pPr>
-              <a:spcAft>
-                <a:spcPts val="600"/>
-              </a:spcAft>
-            </a:pPr>
-            <a:r>
-              <a:rPr sz="1500">
-                <a:solidFill>
-                  <a:srgbClr val="22282E"/>
-                </a:solidFill>
-              </a:rPr>
-              <a:t>•  Ejecuta Kerberoasting y crackea al menos una cuenta del lab.</a:t>
-            </a:r>
-          </a:p>
-          <a:p>
-            <a:pPr>
-              <a:spcAft>
-                <a:spcPts val="600"/>
-              </a:spcAft>
-            </a:pPr>
-            <a:r>
-              <a:rPr sz="1500">
-                <a:solidFill>
-                  <a:srgbClr val="22282E"/>
-                </a:solidFill>
-              </a:rPr>
-              <a:t>•  Encuentra una cuenta sin preautenticación y haz AS-REP Roasting.</a:t>
-            </a:r>
-          </a:p>
-          <a:p>
-            <a:pPr>
-              <a:spcAft>
-                <a:spcPts val="600"/>
-              </a:spcAft>
-            </a:pPr>
-            <a:r>
-              <a:rPr sz="1500">
-                <a:solidFill>
-                  <a:srgbClr val="22282E"/>
-                </a:solidFill>
-              </a:rPr>
-              <a:t>•  Compara tiempos de crackeo RC4 vs AES para el mismo hash.</a:t>
-            </a:r>
-          </a:p>
-          <a:p>
-            <a:pPr>
-              <a:spcAft>
-                <a:spcPts val="600"/>
-              </a:spcAft>
-            </a:pPr>
-            <a:r>
-              <a:rPr sz="1500">
-                <a:solidFill>
-                  <a:srgbClr val="22282E"/>
-                </a:solidFill>
-              </a:rPr>
-              <a:t>•  Explica cómo gMSA mitiga el Kerberoasting.</a:t>
-            </a:r>
-          </a:p>
-          <a:p>
-            <a:pPr>
-              <a:spcAft>
-                <a:spcPts val="600"/>
-              </a:spcAft>
-            </a:pPr>
-            <a:r>
-              <a:rPr sz="1500">
-                <a:solidFill>
-                  <a:srgbClr val="22282E"/>
-                </a:solidFill>
-              </a:rPr>
-              <a:t>•  Escribe la regla de detección basada en el evento 4769 con RC4.</a:t>
+              <a:t>•  El AD lab / GOAD de la clase anterior, con al menos una cuenta de servicio con SPN y contraseña débil.</a:t>
+            </a:r>
+          </a:p>
+          <a:p>
+            <a:pPr>
+              <a:spcAft>
+                <a:spcPts val="600"/>
+              </a:spcAft>
+            </a:pPr>
+            <a:r>
+              <a:rPr sz="1500">
+                <a:solidFill>
+                  <a:srgbClr val="22282E"/>
+                </a:solidFill>
+              </a:rPr>
+              <a:t>•  Impacket: GetUserSPNs.py, GetNPUsers.py.</a:t>
+            </a:r>
+          </a:p>
+          <a:p>
+            <a:pPr>
+              <a:spcAft>
+                <a:spcPts val="600"/>
+              </a:spcAft>
+            </a:pPr>
+            <a:r>
+              <a:rPr sz="1500">
+                <a:solidFill>
+                  <a:srgbClr val="22282E"/>
+                </a:solidFill>
+              </a:rPr>
+              <a:t>•  Rubeus (desde Windows) como alternativa nativa.</a:t>
+            </a:r>
+          </a:p>
+          <a:p>
+            <a:pPr>
+              <a:spcAft>
+                <a:spcPts val="600"/>
+              </a:spcAft>
+            </a:pPr>
+            <a:r>
+              <a:rPr sz="1500">
+                <a:solidFill>
+                  <a:srgbClr val="22282E"/>
+                </a:solidFill>
+              </a:rPr>
+              <a:t>•  Hashcat con diccionarios (rockyou) para el crackeo offline.</a:t>
             </a:r>
           </a:p>
         </p:txBody>
@@ -4718,7 +5079,7 @@
                   <a:srgbClr val="0B3D2E"/>
                 </a:solidFill>
               </a:rPr>
-              <a:t>📝 Reto verificable</a:t>
+              <a:t>🧪 Laboratorio guiado</a:t>
             </a:r>
           </a:p>
         </p:txBody>
@@ -4756,22 +5117,97 @@
                   <a:srgbClr val="22282E"/>
                 </a:solidFill>
               </a:rPr>
-              <a:t>•  Compromete la contraseña de una cuenta de servicio de tu AD lab mediante Kerberoasting y crackeo offline, y documenta el evento que el DC generó.</a:t>
-            </a:r>
-          </a:p>
-          <a:p>
-            <a:pPr>
-              <a:spcAft>
-                <a:spcPts val="600"/>
-              </a:spcAft>
-            </a:pPr>
-            <a:r>
-              <a:rPr sz="1500">
-                <a:solidFill>
-                  <a:srgbClr val="22282E"/>
-                </a:solidFill>
-              </a:rPr>
-              <a:t>•  Criterio de aceptación: obtienes en claro la contraseña de una cuenta con SPN, muestras el comando de solicitud y el de crackeo, e identificas el evento 4769 con etype RC4 correspondiente en el registro del DC.</a:t>
+              <a:t>•  Repaso del flujo. Dibuja AS-REQ → AS-REP (TGT) → TGS-REQ → TGS-REP y marca dónde entra material crackeable.</a:t>
+            </a:r>
+          </a:p>
+          <a:p>
+            <a:pPr>
+              <a:spcAft>
+                <a:spcPts val="600"/>
+              </a:spcAft>
+            </a:pPr>
+            <a:r>
+              <a:rPr sz="1500">
+                <a:solidFill>
+                  <a:srgbClr val="22282E"/>
+                </a:solidFill>
+              </a:rPr>
+              <a:t>•  Kerberoasting con Impacket:</a:t>
+            </a:r>
+          </a:p>
+          <a:p>
+            <a:pPr>
+              <a:spcAft>
+                <a:spcPts val="600"/>
+              </a:spcAft>
+            </a:pPr>
+            <a:r>
+              <a:rPr sz="1500">
+                <a:solidFill>
+                  <a:srgbClr val="22282E"/>
+                </a:solidFill>
+              </a:rPr>
+              <a:t>•  Crackea offline:</a:t>
+            </a:r>
+          </a:p>
+          <a:p>
+            <a:pPr>
+              <a:spcAft>
+                <a:spcPts val="600"/>
+              </a:spcAft>
+            </a:pPr>
+            <a:r>
+              <a:rPr sz="1500">
+                <a:solidFill>
+                  <a:srgbClr val="22282E"/>
+                </a:solidFill>
+              </a:rPr>
+              <a:t>•  Recupera la contraseña de la cuenta de servicio.</a:t>
+            </a:r>
+          </a:p>
+          <a:p>
+            <a:pPr>
+              <a:spcAft>
+                <a:spcPts val="600"/>
+              </a:spcAft>
+            </a:pPr>
+            <a:r>
+              <a:rPr sz="1500">
+                <a:solidFill>
+                  <a:srgbClr val="22282E"/>
+                </a:solidFill>
+              </a:rPr>
+              <a:t>•  AS-REP Roasting:</a:t>
+            </a:r>
+          </a:p>
+          <a:p>
+            <a:pPr>
+              <a:spcAft>
+                <a:spcPts val="600"/>
+              </a:spcAft>
+            </a:pPr>
+            <a:r>
+              <a:rPr sz="1500">
+                <a:solidFill>
+                  <a:srgbClr val="22282E"/>
+                </a:solidFill>
+              </a:rPr>
+              <a:t>•  Con Rubeus (Windows): Rubeus.exe kerberoast /outfile:roast.txt y compara el flujo con Impacket.</a:t>
+            </a:r>
+          </a:p>
+          <a:p>
+            <a:pPr>
+              <a:spcAft>
+                <a:spcPts val="600"/>
+              </a:spcAft>
+            </a:pPr>
+            <a:r>
+              <a:rPr sz="1500">
+                <a:solidFill>
+                  <a:srgbClr val="22282E"/>
+                </a:solidFill>
+              </a:rPr>
+              <a:t>•  Fuerza RC4 y compara. Solicita el TGS con etype RC4 y observa cuánto más rápido cracker frente a AES.</a:t>
             </a:r>
           </a:p>
         </p:txBody>
